--- a/resources/DataProcessingDocumentation.pptx
+++ b/resources/DataProcessingDocumentation.pptx
@@ -230,7 +230,7 @@
           <a:p>
             <a:fld id="{A0EDB7BB-2F45-498B-BAA5-C7C8A1082E91}" type="datetimeFigureOut">
               <a:rPr lang="en-US" smtClean="0"/>
-              <a:t>10/19/2025</a:t>
+              <a:t>10/22/2025</a:t>
             </a:fld>
             <a:endParaRPr lang="en-US"/>
           </a:p>
@@ -1088,7 +1088,7 @@
           <a:p>
             <a:fld id="{1B31CA29-C2EB-451B-A0BB-9B4644E6EA20}" type="datetimeFigureOut">
               <a:rPr lang="en-US" smtClean="0"/>
-              <a:t>10/19/2025</a:t>
+              <a:t>10/22/2025</a:t>
             </a:fld>
             <a:endParaRPr lang="en-US"/>
           </a:p>
@@ -1286,7 +1286,7 @@
           <a:p>
             <a:fld id="{1B31CA29-C2EB-451B-A0BB-9B4644E6EA20}" type="datetimeFigureOut">
               <a:rPr lang="en-US" smtClean="0"/>
-              <a:t>10/19/2025</a:t>
+              <a:t>10/22/2025</a:t>
             </a:fld>
             <a:endParaRPr lang="en-US"/>
           </a:p>
@@ -1494,7 +1494,7 @@
           <a:p>
             <a:fld id="{1B31CA29-C2EB-451B-A0BB-9B4644E6EA20}" type="datetimeFigureOut">
               <a:rPr lang="en-US" smtClean="0"/>
-              <a:t>10/19/2025</a:t>
+              <a:t>10/22/2025</a:t>
             </a:fld>
             <a:endParaRPr lang="en-US"/>
           </a:p>
@@ -1692,7 +1692,7 @@
           <a:p>
             <a:fld id="{1B31CA29-C2EB-451B-A0BB-9B4644E6EA20}" type="datetimeFigureOut">
               <a:rPr lang="en-US" smtClean="0"/>
-              <a:t>10/19/2025</a:t>
+              <a:t>10/22/2025</a:t>
             </a:fld>
             <a:endParaRPr lang="en-US"/>
           </a:p>
@@ -1967,7 +1967,7 @@
           <a:p>
             <a:fld id="{1B31CA29-C2EB-451B-A0BB-9B4644E6EA20}" type="datetimeFigureOut">
               <a:rPr lang="en-US" smtClean="0"/>
-              <a:t>10/19/2025</a:t>
+              <a:t>10/22/2025</a:t>
             </a:fld>
             <a:endParaRPr lang="en-US"/>
           </a:p>
@@ -2232,7 +2232,7 @@
           <a:p>
             <a:fld id="{1B31CA29-C2EB-451B-A0BB-9B4644E6EA20}" type="datetimeFigureOut">
               <a:rPr lang="en-US" smtClean="0"/>
-              <a:t>10/19/2025</a:t>
+              <a:t>10/22/2025</a:t>
             </a:fld>
             <a:endParaRPr lang="en-US"/>
           </a:p>
@@ -2644,7 +2644,7 @@
           <a:p>
             <a:fld id="{1B31CA29-C2EB-451B-A0BB-9B4644E6EA20}" type="datetimeFigureOut">
               <a:rPr lang="en-US" smtClean="0"/>
-              <a:t>10/19/2025</a:t>
+              <a:t>10/22/2025</a:t>
             </a:fld>
             <a:endParaRPr lang="en-US"/>
           </a:p>
@@ -2785,7 +2785,7 @@
           <a:p>
             <a:fld id="{1B31CA29-C2EB-451B-A0BB-9B4644E6EA20}" type="datetimeFigureOut">
               <a:rPr lang="en-US" smtClean="0"/>
-              <a:t>10/19/2025</a:t>
+              <a:t>10/22/2025</a:t>
             </a:fld>
             <a:endParaRPr lang="en-US"/>
           </a:p>
@@ -2898,7 +2898,7 @@
           <a:p>
             <a:fld id="{1B31CA29-C2EB-451B-A0BB-9B4644E6EA20}" type="datetimeFigureOut">
               <a:rPr lang="en-US" smtClean="0"/>
-              <a:t>10/19/2025</a:t>
+              <a:t>10/22/2025</a:t>
             </a:fld>
             <a:endParaRPr lang="en-US"/>
           </a:p>
@@ -3209,7 +3209,7 @@
           <a:p>
             <a:fld id="{1B31CA29-C2EB-451B-A0BB-9B4644E6EA20}" type="datetimeFigureOut">
               <a:rPr lang="en-US" smtClean="0"/>
-              <a:t>10/19/2025</a:t>
+              <a:t>10/22/2025</a:t>
             </a:fld>
             <a:endParaRPr lang="en-US"/>
           </a:p>
@@ -3497,7 +3497,7 @@
           <a:p>
             <a:fld id="{1B31CA29-C2EB-451B-A0BB-9B4644E6EA20}" type="datetimeFigureOut">
               <a:rPr lang="en-US" smtClean="0"/>
-              <a:t>10/19/2025</a:t>
+              <a:t>10/22/2025</a:t>
             </a:fld>
             <a:endParaRPr lang="en-US"/>
           </a:p>
@@ -3738,7 +3738,7 @@
           <a:p>
             <a:fld id="{1B31CA29-C2EB-451B-A0BB-9B4644E6EA20}" type="datetimeFigureOut">
               <a:rPr lang="en-US" smtClean="0"/>
-              <a:t>10/19/2025</a:t>
+              <a:t>10/22/2025</a:t>
             </a:fld>
             <a:endParaRPr lang="en-US"/>
           </a:p>
@@ -7101,8 +7101,8 @@
         </p:nvSpPr>
         <p:spPr>
           <a:xfrm>
-            <a:off x="671516" y="2697284"/>
-            <a:ext cx="6299200" cy="2062103"/>
+            <a:off x="671515" y="2697284"/>
+            <a:ext cx="6897685" cy="2062103"/>
           </a:xfrm>
           <a:prstGeom prst="rect">
             <a:avLst/>
@@ -7166,7 +7166,7 @@
             </a:r>
             <a:r>
               <a:rPr lang="en-US" sz="3200" dirty="0"/>
-              <a:t> sections alone</a:t>
+              <a:t> sections alone . . . for now</a:t>
             </a:r>
           </a:p>
         </p:txBody>
